--- a/dataset/guides_final/SYS/guide/IT-SYS-004_메일 이용 장애 대응 가이드.pptx
+++ b/dataset/guides_final/SYS/guide/IT-SYS-004_메일 이용 장애 대응 가이드.pptx
@@ -3254,7 +3254,7 @@
                 <a:ea typeface="Malgun Gothic"/>
                 <a:cs typeface="Malgun Gothic"/>
               </a:rPr>
-              <a:t>한화시스템 ICT 임직원 IT 안내 · 사내 시스템</a:t>
+              <a:t>가상 ICT 기업 임직원 IT 안내 · 사내 시스템</a:t>
             </a:r>
           </a:p>
         </p:txBody>
@@ -3486,7 +3486,7 @@
                 <a:ea typeface="Malgun Gothic"/>
                 <a:cs typeface="Malgun Gothic"/>
               </a:rPr>
-              <a:t>© HANWHA SYSTEMS ICT · IT-SYS-004 · 사내 일반</a:t>
+              <a:t>© 가상 ICT 기업 · IT-SYS-004 · 사내 일반</a:t>
             </a:r>
           </a:p>
         </p:txBody>
@@ -6260,7 +6260,7 @@
                 <a:ea typeface="Malgun Gothic"/>
                 <a:cs typeface="Malgun Gothic"/>
               </a:rPr>
-              <a:t>© HANWHA SYSTEMS ICT · IT-SYS-004 · 사내 일반</a:t>
+              <a:t>© 가상 ICT 기업 · IT-SYS-004 · 사내 일반</a:t>
             </a:r>
           </a:p>
         </p:txBody>
@@ -6823,7 +6823,7 @@
                 <a:ea typeface="Malgun Gothic"/>
                 <a:cs typeface="Malgun Gothic"/>
               </a:rPr>
-              <a:t>© HANWHA SYSTEMS ICT · IT-SYS-004 · 사내 일반</a:t>
+              <a:t>© 가상 ICT 기업 · IT-SYS-004 · 사내 일반</a:t>
             </a:r>
           </a:p>
         </p:txBody>
@@ -7457,7 +7457,7 @@
                 <a:ea typeface="Malgun Gothic"/>
                 <a:cs typeface="Malgun Gothic"/>
               </a:rPr>
-              <a:t>© HANWHA SYSTEMS ICT · IT-SYS-004 · 사내 일반</a:t>
+              <a:t>© 가상 ICT 기업 · IT-SYS-004 · 사내 일반</a:t>
             </a:r>
           </a:p>
         </p:txBody>
@@ -8162,7 +8162,7 @@
                 <a:ea typeface="Malgun Gothic"/>
                 <a:cs typeface="Malgun Gothic"/>
               </a:rPr>
-              <a:t>© HANWHA SYSTEMS ICT · IT-SYS-004 · 사내 일반</a:t>
+              <a:t>© 가상 ICT 기업 · IT-SYS-004 · 사내 일반</a:t>
             </a:r>
           </a:p>
         </p:txBody>
@@ -8725,7 +8725,7 @@
                 <a:ea typeface="Malgun Gothic"/>
                 <a:cs typeface="Malgun Gothic"/>
               </a:rPr>
-              <a:t>© HANWHA SYSTEMS ICT · IT-SYS-004 · 사내 일반</a:t>
+              <a:t>© 가상 ICT 기업 · IT-SYS-004 · 사내 일반</a:t>
             </a:r>
           </a:p>
         </p:txBody>
@@ -11593,7 +11593,7 @@
                 <a:ea typeface="Malgun Gothic"/>
                 <a:cs typeface="Malgun Gothic"/>
               </a:rPr>
-              <a:t>© HANWHA SYSTEMS ICT · IT-SYS-004 · 사내 일반</a:t>
+              <a:t>© 가상 ICT 기업 · IT-SYS-004 · 사내 일반</a:t>
             </a:r>
           </a:p>
         </p:txBody>
@@ -12274,7 +12274,7 @@
                 <a:ea typeface="Malgun Gothic"/>
                 <a:cs typeface="Malgun Gothic"/>
               </a:rPr>
-              <a:t>© HANWHA SYSTEMS ICT · IT-SYS-004 · 사내 일반</a:t>
+              <a:t>© 가상 ICT 기업 · IT-SYS-004 · 사내 일반</a:t>
             </a:r>
           </a:p>
         </p:txBody>
@@ -12884,7 +12884,7 @@
                 <a:ea typeface="Malgun Gothic"/>
                 <a:cs typeface="Malgun Gothic"/>
               </a:rPr>
-              <a:t>© HANWHA SYSTEMS ICT · IT-SYS-004 · 사내 일반</a:t>
+              <a:t>© 가상 ICT 기업 · IT-SYS-004 · 사내 일반</a:t>
             </a:r>
           </a:p>
         </p:txBody>
@@ -13494,7 +13494,7 @@
                 <a:ea typeface="Malgun Gothic"/>
                 <a:cs typeface="Malgun Gothic"/>
               </a:rPr>
-              <a:t>© HANWHA SYSTEMS ICT · IT-SYS-004 · 사내 일반</a:t>
+              <a:t>© 가상 ICT 기업 · IT-SYS-004 · 사내 일반</a:t>
             </a:r>
           </a:p>
         </p:txBody>
@@ -16244,7 +16244,7 @@
                 <a:ea typeface="Malgun Gothic"/>
                 <a:cs typeface="Malgun Gothic"/>
               </a:rPr>
-              <a:t>© HANWHA SYSTEMS ICT · IT-SYS-004 · 사내 일반</a:t>
+              <a:t>© 가상 ICT 기업 · IT-SYS-004 · 사내 일반</a:t>
             </a:r>
           </a:p>
         </p:txBody>
@@ -18073,7 +18073,7 @@
                 <a:ea typeface="Malgun Gothic"/>
                 <a:cs typeface="Malgun Gothic"/>
               </a:rPr>
-              <a:t>© HANWHA SYSTEMS ICT · IT-SYS-004 · 사내 일반</a:t>
+              <a:t>© 가상 ICT 기업 · IT-SYS-004 · 사내 일반</a:t>
             </a:r>
           </a:p>
         </p:txBody>
@@ -18683,7 +18683,7 @@
                 <a:ea typeface="Malgun Gothic"/>
                 <a:cs typeface="Malgun Gothic"/>
               </a:rPr>
-              <a:t>© HANWHA SYSTEMS ICT · IT-SYS-004 · 사내 일반</a:t>
+              <a:t>© 가상 ICT 기업 · IT-SYS-004 · 사내 일반</a:t>
             </a:r>
           </a:p>
         </p:txBody>
@@ -19294,7 +19294,7 @@
                 <a:ea typeface="Malgun Gothic"/>
                 <a:cs typeface="Malgun Gothic"/>
               </a:rPr>
-              <a:t>© HANWHA SYSTEMS ICT · IT-SYS-004 · 사내 일반</a:t>
+              <a:t>© 가상 ICT 기업 · IT-SYS-004 · 사내 일반</a:t>
             </a:r>
           </a:p>
         </p:txBody>
@@ -19952,7 +19952,7 @@
                 <a:ea typeface="Malgun Gothic"/>
                 <a:cs typeface="Malgun Gothic"/>
               </a:rPr>
-              <a:t>© HANWHA SYSTEMS ICT · IT-SYS-004 · 사내 일반</a:t>
+              <a:t>© 가상 ICT 기업 · IT-SYS-004 · 사내 일반</a:t>
             </a:r>
           </a:p>
         </p:txBody>
@@ -20609,7 +20609,7 @@
                 <a:ea typeface="Malgun Gothic"/>
                 <a:cs typeface="Malgun Gothic"/>
               </a:rPr>
-              <a:t>© HANWHA SYSTEMS ICT · IT-SYS-004 · 사내 일반</a:t>
+              <a:t>© 가상 ICT 기업 · IT-SYS-004 · 사내 일반</a:t>
             </a:r>
           </a:p>
         </p:txBody>
@@ -23265,7 +23265,7 @@
                 <a:ea typeface="Malgun Gothic"/>
                 <a:cs typeface="Malgun Gothic"/>
               </a:rPr>
-              <a:t>© HANWHA SYSTEMS ICT · IT-SYS-004 · 사내 일반</a:t>
+              <a:t>© 가상 ICT 기업 · IT-SYS-004 · 사내 일반</a:t>
             </a:r>
           </a:p>
         </p:txBody>
@@ -23828,7 +23828,7 @@
                 <a:ea typeface="Malgun Gothic"/>
                 <a:cs typeface="Malgun Gothic"/>
               </a:rPr>
-              <a:t>© HANWHA SYSTEMS ICT · IT-SYS-004 · 사내 일반</a:t>
+              <a:t>© 가상 ICT 기업 · IT-SYS-004 · 사내 일반</a:t>
             </a:r>
           </a:p>
         </p:txBody>
@@ -24344,7 +24344,7 @@
                 <a:ea typeface="Malgun Gothic"/>
                 <a:cs typeface="Malgun Gothic"/>
               </a:rPr>
-              <a:t>© HANWHA SYSTEMS ICT · IT-SYS-004 · 사내 일반</a:t>
+              <a:t>© 가상 ICT 기업 · IT-SYS-004 · 사내 일반</a:t>
             </a:r>
           </a:p>
         </p:txBody>
@@ -24955,7 +24955,7 @@
                 <a:ea typeface="Malgun Gothic"/>
                 <a:cs typeface="Malgun Gothic"/>
               </a:rPr>
-              <a:t>© HANWHA SYSTEMS ICT · IT-SYS-004 · 사내 일반</a:t>
+              <a:t>© 가상 ICT 기업 · IT-SYS-004 · 사내 일반</a:t>
             </a:r>
           </a:p>
         </p:txBody>
@@ -25518,7 +25518,7 @@
                 <a:ea typeface="Malgun Gothic"/>
                 <a:cs typeface="Malgun Gothic"/>
               </a:rPr>
-              <a:t>© HANWHA SYSTEMS ICT · IT-SYS-004 · 사내 일반</a:t>
+              <a:t>© 가상 ICT 기업 · IT-SYS-004 · 사내 일반</a:t>
             </a:r>
           </a:p>
         </p:txBody>
@@ -28292,7 +28292,7 @@
                 <a:ea typeface="Malgun Gothic"/>
                 <a:cs typeface="Malgun Gothic"/>
               </a:rPr>
-              <a:t>© HANWHA SYSTEMS ICT · IT-SYS-004 · 사내 일반</a:t>
+              <a:t>© 가상 ICT 기업 · IT-SYS-004 · 사내 일반</a:t>
             </a:r>
           </a:p>
         </p:txBody>
@@ -29568,7 +29568,7 @@
                 <a:ea typeface="Malgun Gothic"/>
                 <a:cs typeface="Malgun Gothic"/>
               </a:rPr>
-              <a:t>© HANWHA SYSTEMS ICT · IT-SYS-004 · 사내 일반</a:t>
+              <a:t>© 가상 ICT 기업 · IT-SYS-004 · 사내 일반</a:t>
             </a:r>
           </a:p>
         </p:txBody>
@@ -30178,7 +30178,7 @@
                 <a:ea typeface="Malgun Gothic"/>
                 <a:cs typeface="Malgun Gothic"/>
               </a:rPr>
-              <a:t>© HANWHA SYSTEMS ICT · IT-SYS-004 · 사내 일반</a:t>
+              <a:t>© 가상 ICT 기업 · IT-SYS-004 · 사내 일반</a:t>
             </a:r>
           </a:p>
         </p:txBody>
@@ -30741,7 +30741,7 @@
                 <a:ea typeface="Malgun Gothic"/>
                 <a:cs typeface="Malgun Gothic"/>
               </a:rPr>
-              <a:t>© HANWHA SYSTEMS ICT · IT-SYS-004 · 사내 일반</a:t>
+              <a:t>© 가상 ICT 기업 · IT-SYS-004 · 사내 일반</a:t>
             </a:r>
           </a:p>
         </p:txBody>
@@ -31517,7 +31517,7 @@
                 <a:ea typeface="Malgun Gothic"/>
                 <a:cs typeface="Malgun Gothic"/>
               </a:rPr>
-              <a:t>© HANWHA SYSTEMS ICT · IT-SYS-004 · 사내 일반</a:t>
+              <a:t>© 가상 ICT 기업 · IT-SYS-004 · 사내 일반</a:t>
             </a:r>
           </a:p>
         </p:txBody>
@@ -31765,7 +31765,7 @@
                 <a:ea typeface="Malgun Gothic"/>
                 <a:cs typeface="Malgun Gothic"/>
               </a:rPr>
-              <a:t>© HANWHA SYSTEMS ICT · IT-SYS-004 · 사내 일반</a:t>
+              <a:t>© 가상 ICT 기업 · IT-SYS-004 · 사내 일반</a:t>
             </a:r>
           </a:p>
         </p:txBody>
@@ -32594,7 +32594,7 @@
                 <a:ea typeface="Malgun Gothic"/>
                 <a:cs typeface="Malgun Gothic"/>
               </a:rPr>
-              <a:t>© HANWHA SYSTEMS ICT · IT-SYS-004 · 사내 일반</a:t>
+              <a:t>© 가상 ICT 기업 · IT-SYS-004 · 사내 일반</a:t>
             </a:r>
           </a:p>
         </p:txBody>
@@ -32842,7 +32842,7 @@
                 <a:ea typeface="Malgun Gothic"/>
                 <a:cs typeface="Malgun Gothic"/>
               </a:rPr>
-              <a:t>© HANWHA SYSTEMS ICT · IT-SYS-004 · 사내 일반</a:t>
+              <a:t>© 가상 ICT 기업 · IT-SYS-004 · 사내 일반</a:t>
             </a:r>
           </a:p>
         </p:txBody>
@@ -33407,7 +33407,7 @@
                 <a:ea typeface="Malgun Gothic"/>
                 <a:cs typeface="Malgun Gothic"/>
               </a:rPr>
-              <a:t>© HANWHA SYSTEMS ICT · IT-SYS-004 · 사내 일반</a:t>
+              <a:t>© 가상 ICT 기업 · IT-SYS-004 · 사내 일반</a:t>
             </a:r>
           </a:p>
         </p:txBody>
@@ -33655,7 +33655,7 @@
                 <a:ea typeface="Malgun Gothic"/>
                 <a:cs typeface="Malgun Gothic"/>
               </a:rPr>
-              <a:t>© HANWHA SYSTEMS ICT · IT-SYS-004 · 사내 일반</a:t>
+              <a:t>© 가상 ICT 기업 · IT-SYS-004 · 사내 일반</a:t>
             </a:r>
           </a:p>
         </p:txBody>
@@ -34167,7 +34167,7 @@
                           <a:ea typeface="Malgun Gothic"/>
                           <a:cs typeface="Malgun Gothic"/>
                         </a:rPr>
-                        <a:t>사내 IT 포털(hanwha-admin) 상단 [챗봇 문의]</a:t>
+                        <a:t>사내 IT 포털 상단 [챗봇 문의]</a:t>
                       </a:r>
                     </a:p>
                   </a:txBody>
@@ -34859,7 +34859,7 @@
                           <a:ea typeface="Malgun Gothic"/>
                           <a:cs typeface="Malgun Gothic"/>
                         </a:rPr>
-                        <a:t>it-helpdesk@hanwha-ict.example</a:t>
+                        <a:t>it-helpdesk@ict.example</a:t>
                       </a:r>
                     </a:p>
                   </a:txBody>
@@ -35158,7 +35158,7 @@
                 <a:ea typeface="Malgun Gothic"/>
                 <a:cs typeface="Malgun Gothic"/>
               </a:rPr>
-              <a:t>© HANWHA SYSTEMS ICT · IT-SYS-004 · 사내 일반</a:t>
+              <a:t>© 가상 ICT 기업 · IT-SYS-004 · 사내 일반</a:t>
             </a:r>
           </a:p>
         </p:txBody>
@@ -35406,7 +35406,7 @@
                 <a:ea typeface="Malgun Gothic"/>
                 <a:cs typeface="Malgun Gothic"/>
               </a:rPr>
-              <a:t>© HANWHA SYSTEMS ICT · IT-SYS-004 · 사내 일반</a:t>
+              <a:t>© 가상 ICT 기업 · IT-SYS-004 · 사내 일반</a:t>
             </a:r>
           </a:p>
         </p:txBody>
@@ -35654,7 +35654,7 @@
                 <a:ea typeface="Malgun Gothic"/>
                 <a:cs typeface="Malgun Gothic"/>
               </a:rPr>
-              <a:t>© HANWHA SYSTEMS ICT · IT-SYS-004 · 사내 일반</a:t>
+              <a:t>© 가상 ICT 기업 · IT-SYS-004 · 사내 일반</a:t>
             </a:r>
           </a:p>
         </p:txBody>
@@ -37701,7 +37701,7 @@
                 <a:ea typeface="Malgun Gothic"/>
                 <a:cs typeface="Malgun Gothic"/>
               </a:rPr>
-              <a:t>© HANWHA SYSTEMS ICT · IT-SYS-004 · 사내 일반</a:t>
+              <a:t>© 가상 ICT 기업 · IT-SYS-004 · 사내 일반</a:t>
             </a:r>
           </a:p>
         </p:txBody>
@@ -38678,7 +38678,7 @@
                 <a:ea typeface="Malgun Gothic"/>
                 <a:cs typeface="Malgun Gothic"/>
               </a:rPr>
-              <a:t>© HANWHA SYSTEMS ICT · IT-SYS-004 · 사내 일반</a:t>
+              <a:t>© 가상 ICT 기업 · IT-SYS-004 · 사내 일반</a:t>
             </a:r>
           </a:p>
         </p:txBody>
@@ -39446,7 +39446,7 @@
                 <a:ea typeface="Malgun Gothic"/>
                 <a:cs typeface="Malgun Gothic"/>
               </a:rPr>
-              <a:t>© HANWHA SYSTEMS ICT · IT-SYS-004 · 사내 일반</a:t>
+              <a:t>© 가상 ICT 기업 · IT-SYS-004 · 사내 일반</a:t>
             </a:r>
           </a:p>
         </p:txBody>
@@ -39694,7 +39694,7 @@
                 <a:ea typeface="Malgun Gothic"/>
                 <a:cs typeface="Malgun Gothic"/>
               </a:rPr>
-              <a:t>© HANWHA SYSTEMS ICT · IT-SYS-004 · 사내 일반</a:t>
+              <a:t>© 가상 ICT 기업 · IT-SYS-004 · 사내 일반</a:t>
             </a:r>
           </a:p>
         </p:txBody>
@@ -40353,7 +40353,7 @@
                 <a:ea typeface="Malgun Gothic"/>
                 <a:cs typeface="Malgun Gothic"/>
               </a:rPr>
-              <a:t>© HANWHA SYSTEMS ICT · IT-SYS-004 · 사내 일반</a:t>
+              <a:t>© 가상 ICT 기업 · IT-SYS-004 · 사내 일반</a:t>
             </a:r>
           </a:p>
         </p:txBody>
@@ -40601,7 +40601,7 @@
                 <a:ea typeface="Malgun Gothic"/>
                 <a:cs typeface="Malgun Gothic"/>
               </a:rPr>
-              <a:t>© HANWHA SYSTEMS ICT · IT-SYS-004 · 사내 일반</a:t>
+              <a:t>© 가상 ICT 기업 · IT-SYS-004 · 사내 일반</a:t>
             </a:r>
           </a:p>
         </p:txBody>
@@ -43115,7 +43115,7 @@
                 <a:ea typeface="Malgun Gothic"/>
                 <a:cs typeface="Malgun Gothic"/>
               </a:rPr>
-              <a:t>© HANWHA SYSTEMS ICT · IT-SYS-004 · 사내 일반</a:t>
+              <a:t>© 가상 ICT 기업 · IT-SYS-004 · 사내 일반</a:t>
             </a:r>
           </a:p>
         </p:txBody>
